--- a/Презентация курсовая Марин Виктор ИСП-21.pptx
+++ b/Презентация курсовая Марин Виктор ИСП-21.pptx
@@ -1638,7 +1638,7 @@
           </a:prstGeom>
           <a:extLst>
             <a:ext uri="{C572A759-6A51-4108-AA02-DFA0A04FC94B}">
-              <ma14:wrappingTextBoxFlag xmlns="" xmlns:ma14="http://schemas.microsoft.com/office/mac/drawingml/2011/main" val="0"/>
+              <ma14:wrappingTextBoxFlag xmlns:ma14="http://schemas.microsoft.com/office/mac/drawingml/2011/main" xmlns="" val="0"/>
             </a:ext>
           </a:extLst>
         </p:spPr>
@@ -1713,7 +1713,7 @@
           </a:prstGeom>
           <a:extLst>
             <a:ext uri="{C572A759-6A51-4108-AA02-DFA0A04FC94B}">
-              <ma14:wrappingTextBoxFlag xmlns="" xmlns:ma14="http://schemas.microsoft.com/office/mac/drawingml/2011/main" val="0"/>
+              <ma14:wrappingTextBoxFlag xmlns:ma14="http://schemas.microsoft.com/office/mac/drawingml/2011/main" xmlns="" val="0"/>
             </a:ext>
           </a:extLst>
         </p:spPr>
@@ -2161,7 +2161,7 @@
           </a:prstGeom>
           <a:extLst>
             <a:ext uri="{C572A759-6A51-4108-AA02-DFA0A04FC94B}">
-              <ma14:wrappingTextBoxFlag xmlns="" xmlns:ma14="http://schemas.microsoft.com/office/mac/drawingml/2011/main" val="0"/>
+              <ma14:wrappingTextBoxFlag xmlns:ma14="http://schemas.microsoft.com/office/mac/drawingml/2011/main" xmlns="" val="0"/>
             </a:ext>
           </a:extLst>
         </p:spPr>
@@ -2668,7 +2668,7 @@
           </a:prstGeom>
           <a:extLst>
             <a:ext uri="{C572A759-6A51-4108-AA02-DFA0A04FC94B}">
-              <ma14:wrappingTextBoxFlag xmlns:ma14="http://schemas.microsoft.com/office/mac/drawingml/2011/main" xmlns="" val="0"/>
+              <ma14:wrappingTextBoxFlag xmlns="" xmlns:ma14="http://schemas.microsoft.com/office/mac/drawingml/2011/main" val="0"/>
             </a:ext>
           </a:extLst>
         </p:spPr>
@@ -2891,7 +2891,7 @@
           </a:prstGeom>
           <a:extLst>
             <a:ext uri="{C572A759-6A51-4108-AA02-DFA0A04FC94B}">
-              <ma14:wrappingTextBoxFlag xmlns="" xmlns:ma14="http://schemas.microsoft.com/office/mac/drawingml/2011/main" val="0"/>
+              <ma14:wrappingTextBoxFlag xmlns:ma14="http://schemas.microsoft.com/office/mac/drawingml/2011/main" xmlns="" val="0"/>
             </a:ext>
           </a:extLst>
         </p:spPr>
@@ -3393,7 +3393,7 @@
           </a:prstGeom>
           <a:extLst>
             <a:ext uri="{C572A759-6A51-4108-AA02-DFA0A04FC94B}">
-              <ma14:wrappingTextBoxFlag xmlns="" xmlns:ma14="http://schemas.microsoft.com/office/mac/drawingml/2011/main" val="0"/>
+              <ma14:wrappingTextBoxFlag xmlns:ma14="http://schemas.microsoft.com/office/mac/drawingml/2011/main" xmlns="" val="0"/>
             </a:ext>
           </a:extLst>
         </p:spPr>
@@ -3869,7 +3869,7 @@
           </a:prstGeom>
           <a:extLst>
             <a:ext uri="{C572A759-6A51-4108-AA02-DFA0A04FC94B}">
-              <ma14:wrappingTextBoxFlag xmlns:ma14="http://schemas.microsoft.com/office/mac/drawingml/2011/main" xmlns="" val="0"/>
+              <ma14:wrappingTextBoxFlag xmlns="" xmlns:ma14="http://schemas.microsoft.com/office/mac/drawingml/2011/main" val="0"/>
             </a:ext>
           </a:extLst>
         </p:spPr>
@@ -4627,7 +4627,7 @@
           </a:prstGeom>
           <a:extLst>
             <a:ext uri="{C572A759-6A51-4108-AA02-DFA0A04FC94B}">
-              <ma14:wrappingTextBoxFlag xmlns="" xmlns:ma14="http://schemas.microsoft.com/office/mac/drawingml/2011/main" val="0"/>
+              <ma14:wrappingTextBoxFlag xmlns:ma14="http://schemas.microsoft.com/office/mac/drawingml/2011/main" xmlns="" val="0"/>
             </a:ext>
           </a:extLst>
         </p:spPr>
@@ -5420,7 +5420,7 @@
           </a:prstGeom>
           <a:extLst>
             <a:ext uri="{C572A759-6A51-4108-AA02-DFA0A04FC94B}">
-              <ma14:wrappingTextBoxFlag xmlns="" xmlns:ma14="http://schemas.microsoft.com/office/mac/drawingml/2011/main" val="0"/>
+              <ma14:wrappingTextBoxFlag xmlns:ma14="http://schemas.microsoft.com/office/mac/drawingml/2011/main" xmlns="" val="0"/>
             </a:ext>
           </a:extLst>
         </p:spPr>
@@ -5500,7 +5500,7 @@
           </a:prstGeom>
           <a:extLst>
             <a:ext uri="{C572A759-6A51-4108-AA02-DFA0A04FC94B}">
-              <ma14:wrappingTextBoxFlag xmlns="" xmlns:ma14="http://schemas.microsoft.com/office/mac/drawingml/2011/main" val="0"/>
+              <ma14:wrappingTextBoxFlag xmlns:ma14="http://schemas.microsoft.com/office/mac/drawingml/2011/main" xmlns="" val="0"/>
             </a:ext>
           </a:extLst>
         </p:spPr>
@@ -5998,7 +5998,7 @@
           </a:prstGeom>
           <a:extLst>
             <a:ext uri="{C572A759-6A51-4108-AA02-DFA0A04FC94B}">
-              <ma14:wrappingTextBoxFlag xmlns="" xmlns:ma14="http://schemas.microsoft.com/office/mac/drawingml/2011/main" val="0"/>
+              <ma14:wrappingTextBoxFlag xmlns:ma14="http://schemas.microsoft.com/office/mac/drawingml/2011/main" xmlns="" val="0"/>
             </a:ext>
           </a:extLst>
         </p:spPr>
@@ -6377,7 +6377,7 @@
           </a:prstGeom>
           <a:extLst>
             <a:ext uri="{C572A759-6A51-4108-AA02-DFA0A04FC94B}">
-              <ma14:wrappingTextBoxFlag xmlns="" xmlns:ma14="http://schemas.microsoft.com/office/mac/drawingml/2011/main" val="0"/>
+              <ma14:wrappingTextBoxFlag xmlns:ma14="http://schemas.microsoft.com/office/mac/drawingml/2011/main" xmlns="" val="0"/>
             </a:ext>
           </a:extLst>
         </p:spPr>
@@ -6596,8 +6596,8 @@
         </p:nvSpPr>
         <p:spPr>
           <a:xfrm>
-            <a:off x="9404663" y="1728787"/>
-            <a:ext cx="7727324" cy="6694140"/>
+            <a:off x="9404663" y="2382121"/>
+            <a:ext cx="7727324" cy="5493812"/>
           </a:xfrm>
           <a:prstGeom prst="rect">
             <a:avLst/>
@@ -6647,7 +6647,7 @@
                 <a:latin typeface="Nunito Bold" pitchFamily="2" charset="-52"/>
                 <a:ea typeface="Aptos" panose="020B0004020202020204" pitchFamily="34" charset="0"/>
               </a:rPr>
-              <a:t>Рассмотреть влияние ключевых параметров алгоритма - количества соседей, выбора метрики расстояния и методов нормализации данных  на итоговое качество классификации.</a:t>
+              <a:t>Рассмотреть влияние ключевых параметров алгоритма - количества соседей, выбора метрики расстояния и методов нормализации данных на итоговое качество классификации.</a:t>
             </a:r>
           </a:p>
           <a:p>
@@ -6859,7 +6859,7 @@
           </a:prstGeom>
           <a:extLst>
             <a:ext uri="{C572A759-6A51-4108-AA02-DFA0A04FC94B}">
-              <ma14:wrappingTextBoxFlag xmlns:ma14="http://schemas.microsoft.com/office/mac/drawingml/2011/main" xmlns="" val="0"/>
+              <ma14:wrappingTextBoxFlag xmlns="" xmlns:ma14="http://schemas.microsoft.com/office/mac/drawingml/2011/main" val="0"/>
             </a:ext>
           </a:extLst>
         </p:spPr>
@@ -7192,7 +7192,7 @@
           </a:prstGeom>
           <a:extLst>
             <a:ext uri="{C572A759-6A51-4108-AA02-DFA0A04FC94B}">
-              <ma14:wrappingTextBoxFlag xmlns="" xmlns:ma14="http://schemas.microsoft.com/office/mac/drawingml/2011/main" val="0"/>
+              <ma14:wrappingTextBoxFlag xmlns:ma14="http://schemas.microsoft.com/office/mac/drawingml/2011/main" xmlns="" val="0"/>
             </a:ext>
           </a:extLst>
         </p:spPr>
@@ -7676,7 +7676,7 @@
           </a:prstGeom>
           <a:extLst>
             <a:ext uri="{C572A759-6A51-4108-AA02-DFA0A04FC94B}">
-              <ma14:wrappingTextBoxFlag xmlns="" xmlns:ma14="http://schemas.microsoft.com/office/mac/drawingml/2011/main" val="0"/>
+              <ma14:wrappingTextBoxFlag xmlns:ma14="http://schemas.microsoft.com/office/mac/drawingml/2011/main" xmlns="" val="0"/>
             </a:ext>
           </a:extLst>
         </p:spPr>
@@ -7753,7 +7753,7 @@
         </p:blipFill>
         <p:spPr>
           <a:xfrm>
-            <a:off x="8882277" y="307785"/>
+            <a:off x="8886425" y="443909"/>
             <a:ext cx="1160060" cy="1160060"/>
           </a:xfrm>
           <a:prstGeom prst="rect">
@@ -8083,7 +8083,7 @@
           </a:prstGeom>
           <a:extLst>
             <a:ext uri="{C572A759-6A51-4108-AA02-DFA0A04FC94B}">
-              <ma14:wrappingTextBoxFlag xmlns="" xmlns:ma14="http://schemas.microsoft.com/office/mac/drawingml/2011/main" val="0"/>
+              <ma14:wrappingTextBoxFlag xmlns:ma14="http://schemas.microsoft.com/office/mac/drawingml/2011/main" xmlns="" val="0"/>
             </a:ext>
           </a:extLst>
         </p:spPr>
@@ -8152,7 +8152,19 @@
           <p:nvPr/>
         </p:nvPicPr>
         <p:blipFill>
-          <a:blip r:embed="rId6"/>
+          <a:blip r:embed="rId6">
+            <a:extLst>
+              <a:ext uri="{BEBA8EAE-BF5A-486C-A8C5-ECC9F3942E4B}">
+                <a14:imgProps xmlns:a14="http://schemas.microsoft.com/office/drawing/2010/main">
+                  <a14:imgLayer r:embed="rId7">
+                    <a14:imgEffect>
+                      <a14:brightnessContrast contrast="-40000"/>
+                    </a14:imgEffect>
+                  </a14:imgLayer>
+                </a14:imgProps>
+              </a:ext>
+            </a:extLst>
+          </a:blip>
           <a:stretch>
             <a:fillRect/>
           </a:stretch>
@@ -8182,7 +8194,7 @@
           <p:nvPr/>
         </p:nvPicPr>
         <p:blipFill>
-          <a:blip r:embed="rId7"/>
+          <a:blip r:embed="rId8"/>
           <a:stretch>
             <a:fillRect/>
           </a:stretch>
@@ -8212,7 +8224,7 @@
           <p:nvPr/>
         </p:nvPicPr>
         <p:blipFill>
-          <a:blip r:embed="rId8"/>
+          <a:blip r:embed="rId9"/>
           <a:stretch>
             <a:fillRect/>
           </a:stretch>
@@ -8329,7 +8341,7 @@
           </a:prstGeom>
           <a:extLst>
             <a:ext uri="{C572A759-6A51-4108-AA02-DFA0A04FC94B}">
-              <ma14:wrappingTextBoxFlag xmlns="" xmlns:ma14="http://schemas.microsoft.com/office/mac/drawingml/2011/main" val="0"/>
+              <ma14:wrappingTextBoxFlag xmlns:ma14="http://schemas.microsoft.com/office/mac/drawingml/2011/main" xmlns="" val="0"/>
             </a:ext>
           </a:extLst>
         </p:spPr>
@@ -8813,7 +8825,7 @@
           </a:prstGeom>
           <a:extLst>
             <a:ext uri="{C572A759-6A51-4108-AA02-DFA0A04FC94B}">
-              <ma14:wrappingTextBoxFlag xmlns:ma14="http://schemas.microsoft.com/office/mac/drawingml/2011/main" xmlns="" val="0"/>
+              <ma14:wrappingTextBoxFlag xmlns="" xmlns:ma14="http://schemas.microsoft.com/office/mac/drawingml/2011/main" val="0"/>
             </a:ext>
           </a:extLst>
         </p:spPr>
@@ -9126,7 +9138,7 @@
         <p:spPr>
           <a:xfrm>
             <a:off x="9801225" y="2235958"/>
-            <a:ext cx="7244829" cy="3084252"/>
+            <a:ext cx="7070099" cy="3084252"/>
           </a:xfrm>
           <a:prstGeom prst="rect">
             <a:avLst/>
@@ -9599,7 +9611,7 @@
           </a:prstGeom>
           <a:extLst>
             <a:ext uri="{C572A759-6A51-4108-AA02-DFA0A04FC94B}">
-              <ma14:wrappingTextBoxFlag xmlns="" xmlns:ma14="http://schemas.microsoft.com/office/mac/drawingml/2011/main" val="0"/>
+              <ma14:wrappingTextBoxFlag xmlns:ma14="http://schemas.microsoft.com/office/mac/drawingml/2011/main" xmlns="" val="0"/>
             </a:ext>
           </a:extLst>
         </p:spPr>

--- a/Презентация курсовая Марин Виктор ИСП-21.pptx
+++ b/Презентация курсовая Марин Виктор ИСП-21.pptx
@@ -1638,7 +1638,7 @@
           </a:prstGeom>
           <a:extLst>
             <a:ext uri="{C572A759-6A51-4108-AA02-DFA0A04FC94B}">
-              <ma14:wrappingTextBoxFlag xmlns:ma14="http://schemas.microsoft.com/office/mac/drawingml/2011/main" xmlns="" val="0"/>
+              <ma14:wrappingTextBoxFlag xmlns="" xmlns:ma14="http://schemas.microsoft.com/office/mac/drawingml/2011/main" val="0"/>
             </a:ext>
           </a:extLst>
         </p:spPr>
@@ -1713,7 +1713,7 @@
           </a:prstGeom>
           <a:extLst>
             <a:ext uri="{C572A759-6A51-4108-AA02-DFA0A04FC94B}">
-              <ma14:wrappingTextBoxFlag xmlns:ma14="http://schemas.microsoft.com/office/mac/drawingml/2011/main" xmlns="" val="0"/>
+              <ma14:wrappingTextBoxFlag xmlns="" xmlns:ma14="http://schemas.microsoft.com/office/mac/drawingml/2011/main" val="0"/>
             </a:ext>
           </a:extLst>
         </p:spPr>
@@ -2161,7 +2161,7 @@
           </a:prstGeom>
           <a:extLst>
             <a:ext uri="{C572A759-6A51-4108-AA02-DFA0A04FC94B}">
-              <ma14:wrappingTextBoxFlag xmlns:ma14="http://schemas.microsoft.com/office/mac/drawingml/2011/main" xmlns="" val="0"/>
+              <ma14:wrappingTextBoxFlag xmlns="" xmlns:ma14="http://schemas.microsoft.com/office/mac/drawingml/2011/main" val="0"/>
             </a:ext>
           </a:extLst>
         </p:spPr>
@@ -2668,7 +2668,7 @@
           </a:prstGeom>
           <a:extLst>
             <a:ext uri="{C572A759-6A51-4108-AA02-DFA0A04FC94B}">
-              <ma14:wrappingTextBoxFlag xmlns="" xmlns:ma14="http://schemas.microsoft.com/office/mac/drawingml/2011/main" val="0"/>
+              <ma14:wrappingTextBoxFlag xmlns:ma14="http://schemas.microsoft.com/office/mac/drawingml/2011/main" xmlns="" val="0"/>
             </a:ext>
           </a:extLst>
         </p:spPr>
@@ -2891,7 +2891,7 @@
           </a:prstGeom>
           <a:extLst>
             <a:ext uri="{C572A759-6A51-4108-AA02-DFA0A04FC94B}">
-              <ma14:wrappingTextBoxFlag xmlns:ma14="http://schemas.microsoft.com/office/mac/drawingml/2011/main" xmlns="" val="0"/>
+              <ma14:wrappingTextBoxFlag xmlns="" xmlns:ma14="http://schemas.microsoft.com/office/mac/drawingml/2011/main" val="0"/>
             </a:ext>
           </a:extLst>
         </p:spPr>
@@ -3393,7 +3393,7 @@
           </a:prstGeom>
           <a:extLst>
             <a:ext uri="{C572A759-6A51-4108-AA02-DFA0A04FC94B}">
-              <ma14:wrappingTextBoxFlag xmlns:ma14="http://schemas.microsoft.com/office/mac/drawingml/2011/main" xmlns="" val="0"/>
+              <ma14:wrappingTextBoxFlag xmlns="" xmlns:ma14="http://schemas.microsoft.com/office/mac/drawingml/2011/main" val="0"/>
             </a:ext>
           </a:extLst>
         </p:spPr>
@@ -3869,7 +3869,7 @@
           </a:prstGeom>
           <a:extLst>
             <a:ext uri="{C572A759-6A51-4108-AA02-DFA0A04FC94B}">
-              <ma14:wrappingTextBoxFlag xmlns="" xmlns:ma14="http://schemas.microsoft.com/office/mac/drawingml/2011/main" val="0"/>
+              <ma14:wrappingTextBoxFlag xmlns:ma14="http://schemas.microsoft.com/office/mac/drawingml/2011/main" xmlns="" val="0"/>
             </a:ext>
           </a:extLst>
         </p:spPr>
@@ -4627,7 +4627,7 @@
           </a:prstGeom>
           <a:extLst>
             <a:ext uri="{C572A759-6A51-4108-AA02-DFA0A04FC94B}">
-              <ma14:wrappingTextBoxFlag xmlns:ma14="http://schemas.microsoft.com/office/mac/drawingml/2011/main" xmlns="" val="0"/>
+              <ma14:wrappingTextBoxFlag xmlns="" xmlns:ma14="http://schemas.microsoft.com/office/mac/drawingml/2011/main" val="0"/>
             </a:ext>
           </a:extLst>
         </p:spPr>
@@ -5420,7 +5420,7 @@
           </a:prstGeom>
           <a:extLst>
             <a:ext uri="{C572A759-6A51-4108-AA02-DFA0A04FC94B}">
-              <ma14:wrappingTextBoxFlag xmlns:ma14="http://schemas.microsoft.com/office/mac/drawingml/2011/main" xmlns="" val="0"/>
+              <ma14:wrappingTextBoxFlag xmlns="" xmlns:ma14="http://schemas.microsoft.com/office/mac/drawingml/2011/main" val="0"/>
             </a:ext>
           </a:extLst>
         </p:spPr>
@@ -5500,7 +5500,7 @@
           </a:prstGeom>
           <a:extLst>
             <a:ext uri="{C572A759-6A51-4108-AA02-DFA0A04FC94B}">
-              <ma14:wrappingTextBoxFlag xmlns:ma14="http://schemas.microsoft.com/office/mac/drawingml/2011/main" xmlns="" val="0"/>
+              <ma14:wrappingTextBoxFlag xmlns="" xmlns:ma14="http://schemas.microsoft.com/office/mac/drawingml/2011/main" val="0"/>
             </a:ext>
           </a:extLst>
         </p:spPr>
@@ -5998,7 +5998,7 @@
           </a:prstGeom>
           <a:extLst>
             <a:ext uri="{C572A759-6A51-4108-AA02-DFA0A04FC94B}">
-              <ma14:wrappingTextBoxFlag xmlns:ma14="http://schemas.microsoft.com/office/mac/drawingml/2011/main" xmlns="" val="0"/>
+              <ma14:wrappingTextBoxFlag xmlns="" xmlns:ma14="http://schemas.microsoft.com/office/mac/drawingml/2011/main" val="0"/>
             </a:ext>
           </a:extLst>
         </p:spPr>
@@ -6377,7 +6377,7 @@
           </a:prstGeom>
           <a:extLst>
             <a:ext uri="{C572A759-6A51-4108-AA02-DFA0A04FC94B}">
-              <ma14:wrappingTextBoxFlag xmlns:ma14="http://schemas.microsoft.com/office/mac/drawingml/2011/main" xmlns="" val="0"/>
+              <ma14:wrappingTextBoxFlag xmlns="" xmlns:ma14="http://schemas.microsoft.com/office/mac/drawingml/2011/main" val="0"/>
             </a:ext>
           </a:extLst>
         </p:spPr>
@@ -6538,7 +6538,7 @@
         </p:nvSpPr>
         <p:spPr>
           <a:xfrm>
-            <a:off x="895350" y="1913317"/>
+            <a:off x="989398" y="2096511"/>
             <a:ext cx="6763985" cy="3046988"/>
           </a:xfrm>
           <a:prstGeom prst="rect">
@@ -6596,8 +6596,8 @@
         </p:nvSpPr>
         <p:spPr>
           <a:xfrm>
-            <a:off x="9404663" y="2382121"/>
-            <a:ext cx="7727324" cy="5493812"/>
+            <a:off x="9404663" y="1973400"/>
+            <a:ext cx="7727324" cy="6340197"/>
           </a:xfrm>
           <a:prstGeom prst="rect">
             <a:avLst/>
@@ -6616,7 +6616,7 @@
               </a:lnSpc>
             </a:pPr>
             <a:r>
-              <a:rPr lang="ru-RU" sz="2600" b="1" dirty="0">
+              <a:rPr lang="ru-RU" sz="2800" b="1" dirty="0">
                 <a:latin typeface="Nunito Bold" pitchFamily="2" charset="-52"/>
               </a:rPr>
               <a:t>Задачи работы</a:t>
@@ -6628,7 +6628,7 @@
               <a:buAutoNum type="arabicPeriod"/>
             </a:pPr>
             <a:r>
-              <a:rPr lang="ru-RU" sz="2600" kern="0" dirty="0">
+              <a:rPr lang="ru-RU" sz="2800" kern="0" dirty="0">
                 <a:effectLst/>
                 <a:latin typeface="Nunito Bold" pitchFamily="2" charset="-52"/>
                 <a:ea typeface="Aptos" panose="020B0004020202020204" pitchFamily="34" charset="0"/>
@@ -6642,12 +6642,12 @@
               <a:buAutoNum type="arabicPeriod"/>
             </a:pPr>
             <a:r>
-              <a:rPr lang="ru-RU" sz="2600" kern="0" dirty="0">
+              <a:rPr lang="ru-RU" sz="2800" kern="0" dirty="0">
                 <a:effectLst/>
                 <a:latin typeface="Nunito Bold" pitchFamily="2" charset="-52"/>
                 <a:ea typeface="Aptos" panose="020B0004020202020204" pitchFamily="34" charset="0"/>
               </a:rPr>
-              <a:t>Рассмотреть влияние ключевых параметров алгоритма - количества соседей, выбора метрики расстояния и методов нормализации данных на итоговое качество классификации.</a:t>
+              <a:t>Рассмотреть влияние ключевых параметров алгоритма на итоговое качество классификации.</a:t>
             </a:r>
           </a:p>
           <a:p>
@@ -6656,7 +6656,7 @@
               <a:buAutoNum type="arabicPeriod"/>
             </a:pPr>
             <a:r>
-              <a:rPr lang="ru-RU" sz="2600" kern="0" dirty="0">
+              <a:rPr lang="ru-RU" sz="2800" kern="0" dirty="0">
                 <a:effectLst/>
                 <a:latin typeface="Nunito Bold" pitchFamily="2" charset="-52"/>
                 <a:ea typeface="Aptos" panose="020B0004020202020204" pitchFamily="34" charset="0"/>
@@ -6664,7 +6664,7 @@
               <a:t>Реализовать программную модель алгоритма </a:t>
             </a:r>
             <a:r>
-              <a:rPr lang="ru-RU" sz="2600" kern="0" dirty="0" err="1">
+              <a:rPr lang="ru-RU" sz="2800" kern="0" dirty="0" err="1">
                 <a:effectLst/>
                 <a:latin typeface="Nunito Bold" pitchFamily="2" charset="-52"/>
                 <a:ea typeface="Aptos" panose="020B0004020202020204" pitchFamily="34" charset="0"/>
@@ -6672,7 +6672,7 @@
               <a:t>kNN</a:t>
             </a:r>
             <a:r>
-              <a:rPr lang="ru-RU" sz="2600" kern="0" dirty="0">
+              <a:rPr lang="ru-RU" sz="2800" kern="0" dirty="0">
                 <a:effectLst/>
                 <a:latin typeface="Nunito Bold" pitchFamily="2" charset="-52"/>
                 <a:ea typeface="Aptos" panose="020B0004020202020204" pitchFamily="34" charset="0"/>
@@ -6686,14 +6686,14 @@
               <a:buAutoNum type="arabicPeriod"/>
             </a:pPr>
             <a:r>
-              <a:rPr lang="ru-RU" sz="2600" kern="0" dirty="0">
+              <a:rPr lang="ru-RU" sz="2800" kern="0" dirty="0">
                 <a:effectLst/>
                 <a:latin typeface="Nunito Bold" pitchFamily="2" charset="-52"/>
                 <a:ea typeface="Aptos" panose="020B0004020202020204" pitchFamily="34" charset="0"/>
               </a:rPr>
               <a:t>Провести экспериментальное исследование, направленное на оценку влияния параметров на результаты классификации</a:t>
             </a:r>
-            <a:endParaRPr lang="ru-RU" sz="2600" dirty="0">
+            <a:endParaRPr lang="ru-RU" sz="2800" dirty="0">
               <a:latin typeface="Nunito Bold" pitchFamily="2" charset="-52"/>
             </a:endParaRPr>
           </a:p>
@@ -6859,7 +6859,7 @@
           </a:prstGeom>
           <a:extLst>
             <a:ext uri="{C572A759-6A51-4108-AA02-DFA0A04FC94B}">
-              <ma14:wrappingTextBoxFlag xmlns="" xmlns:ma14="http://schemas.microsoft.com/office/mac/drawingml/2011/main" val="0"/>
+              <ma14:wrappingTextBoxFlag xmlns:ma14="http://schemas.microsoft.com/office/mac/drawingml/2011/main" xmlns="" val="0"/>
             </a:ext>
           </a:extLst>
         </p:spPr>
@@ -7192,7 +7192,7 @@
           </a:prstGeom>
           <a:extLst>
             <a:ext uri="{C572A759-6A51-4108-AA02-DFA0A04FC94B}">
-              <ma14:wrappingTextBoxFlag xmlns:ma14="http://schemas.microsoft.com/office/mac/drawingml/2011/main" xmlns="" val="0"/>
+              <ma14:wrappingTextBoxFlag xmlns="" xmlns:ma14="http://schemas.microsoft.com/office/mac/drawingml/2011/main" val="0"/>
             </a:ext>
           </a:extLst>
         </p:spPr>
@@ -7676,7 +7676,7 @@
           </a:prstGeom>
           <a:extLst>
             <a:ext uri="{C572A759-6A51-4108-AA02-DFA0A04FC94B}">
-              <ma14:wrappingTextBoxFlag xmlns:ma14="http://schemas.microsoft.com/office/mac/drawingml/2011/main" xmlns="" val="0"/>
+              <ma14:wrappingTextBoxFlag xmlns="" xmlns:ma14="http://schemas.microsoft.com/office/mac/drawingml/2011/main" val="0"/>
             </a:ext>
           </a:extLst>
         </p:spPr>
@@ -8083,7 +8083,7 @@
           </a:prstGeom>
           <a:extLst>
             <a:ext uri="{C572A759-6A51-4108-AA02-DFA0A04FC94B}">
-              <ma14:wrappingTextBoxFlag xmlns:ma14="http://schemas.microsoft.com/office/mac/drawingml/2011/main" xmlns="" val="0"/>
+              <ma14:wrappingTextBoxFlag xmlns="" xmlns:ma14="http://schemas.microsoft.com/office/mac/drawingml/2011/main" val="0"/>
             </a:ext>
           </a:extLst>
         </p:spPr>
@@ -8341,7 +8341,7 @@
           </a:prstGeom>
           <a:extLst>
             <a:ext uri="{C572A759-6A51-4108-AA02-DFA0A04FC94B}">
-              <ma14:wrappingTextBoxFlag xmlns:ma14="http://schemas.microsoft.com/office/mac/drawingml/2011/main" xmlns="" val="0"/>
+              <ma14:wrappingTextBoxFlag xmlns="" xmlns:ma14="http://schemas.microsoft.com/office/mac/drawingml/2011/main" val="0"/>
             </a:ext>
           </a:extLst>
         </p:spPr>
@@ -8825,7 +8825,7 @@
           </a:prstGeom>
           <a:extLst>
             <a:ext uri="{C572A759-6A51-4108-AA02-DFA0A04FC94B}">
-              <ma14:wrappingTextBoxFlag xmlns="" xmlns:ma14="http://schemas.microsoft.com/office/mac/drawingml/2011/main" val="0"/>
+              <ma14:wrappingTextBoxFlag xmlns:ma14="http://schemas.microsoft.com/office/mac/drawingml/2011/main" xmlns="" val="0"/>
             </a:ext>
           </a:extLst>
         </p:spPr>
@@ -9611,7 +9611,7 @@
           </a:prstGeom>
           <a:extLst>
             <a:ext uri="{C572A759-6A51-4108-AA02-DFA0A04FC94B}">
-              <ma14:wrappingTextBoxFlag xmlns:ma14="http://schemas.microsoft.com/office/mac/drawingml/2011/main" xmlns="" val="0"/>
+              <ma14:wrappingTextBoxFlag xmlns="" xmlns:ma14="http://schemas.microsoft.com/office/mac/drawingml/2011/main" val="0"/>
             </a:ext>
           </a:extLst>
         </p:spPr>
